--- a/Project_Disha_IDBI_Innovate_2026.pptx
+++ b/Project_Disha_IDBI_Innovate_2026.pptx
@@ -9102,7 +9102,7 @@
                 </a:solidFill>
                 <a:latin typeface="Calibri"/>
               </a:rPr>
-              <a:t>https://disha-backend-1012823692058.asia-south1.run.app</a:t>
+              <a:t>https://disha-backend-564262191703.asia-south1.run.app</a:t>
             </a:r>
           </a:p>
         </p:txBody>
@@ -9297,7 +9297,7 @@
                 </a:solidFill>
                 <a:latin typeface="Calibri"/>
               </a:rPr>
-              <a:t>https://disha-backend-1012823692058.asia-south1.run.app/health</a:t>
+              <a:t>https://disha-backend-564262191703.asia-south1.run.app/health</a:t>
             </a:r>
           </a:p>
         </p:txBody>
@@ -9492,7 +9492,7 @@
                 </a:solidFill>
                 <a:latin typeface="Calibri"/>
               </a:rPr>
-              <a:t>https://disha-backend-1012823692058.asia-south1.run.app/docs</a:t>
+              <a:t>https://disha-backend-564262191703.asia-south1.run.app/docs</a:t>
             </a:r>
           </a:p>
         </p:txBody>
